--- a/containers_for_hpc.pptx
+++ b/containers_for_hpc.pptx
@@ -402,7 +402,7 @@
           <a:p>
             <a:fld id="{6BD974B4-F374-4E74-84D3-1EB7DBF32A2A}" type="datetimeFigureOut">
               <a:rPr lang="nl-BE" smtClean="0"/>
-              <a:t>11/02/2026</a:t>
+              <a:t>2/10/2026</a:t>
             </a:fld>
             <a:endParaRPr lang="nl-BE"/>
           </a:p>
@@ -885,7 +885,7 @@
           <a:p>
             <a:fld id="{A433E747-842D-4EF3-8202-AC54FEC33061}" type="datetime1">
               <a:rPr lang="nl-BE" smtClean="0"/>
-              <a:t>11/02/2026</a:t>
+              <a:t>2/10/2026</a:t>
             </a:fld>
             <a:endParaRPr lang="nl-BE"/>
           </a:p>
@@ -1055,7 +1055,7 @@
           <a:p>
             <a:fld id="{7C821354-3381-4DF5-ABED-FDAFA2BAD3F8}" type="datetime1">
               <a:rPr lang="nl-BE" smtClean="0"/>
-              <a:t>11/02/2026</a:t>
+              <a:t>2/10/2026</a:t>
             </a:fld>
             <a:endParaRPr lang="nl-BE"/>
           </a:p>
@@ -1235,7 +1235,7 @@
           <a:p>
             <a:fld id="{C6B54B95-9964-4BBF-B171-A69413AB9FC5}" type="datetime1">
               <a:rPr lang="nl-BE" smtClean="0"/>
-              <a:t>11/02/2026</a:t>
+              <a:t>2/10/2026</a:t>
             </a:fld>
             <a:endParaRPr lang="nl-BE"/>
           </a:p>
@@ -1405,7 +1405,7 @@
           <a:p>
             <a:fld id="{BE45CDE5-064C-4862-90E9-83B8FD778625}" type="datetime1">
               <a:rPr lang="nl-BE" smtClean="0"/>
-              <a:t>11/02/2026</a:t>
+              <a:t>2/10/2026</a:t>
             </a:fld>
             <a:endParaRPr lang="nl-BE"/>
           </a:p>
@@ -1649,7 +1649,7 @@
           <a:p>
             <a:fld id="{C75A345C-628E-463E-B8F7-69C25D344DF5}" type="datetime1">
               <a:rPr lang="nl-BE" smtClean="0"/>
-              <a:t>11/02/2026</a:t>
+              <a:t>2/10/2026</a:t>
             </a:fld>
             <a:endParaRPr lang="nl-BE"/>
           </a:p>
@@ -1881,7 +1881,7 @@
           <a:p>
             <a:fld id="{65B04534-538C-4249-A635-8BB2B8486464}" type="datetime1">
               <a:rPr lang="nl-BE" smtClean="0"/>
-              <a:t>11/02/2026</a:t>
+              <a:t>2/10/2026</a:t>
             </a:fld>
             <a:endParaRPr lang="nl-BE"/>
           </a:p>
@@ -2248,7 +2248,7 @@
           <a:p>
             <a:fld id="{089671CB-8547-4C91-A3D5-012E6E8790E6}" type="datetime1">
               <a:rPr lang="nl-BE" smtClean="0"/>
-              <a:t>11/02/2026</a:t>
+              <a:t>2/10/2026</a:t>
             </a:fld>
             <a:endParaRPr lang="nl-BE"/>
           </a:p>
@@ -2366,7 +2366,7 @@
           <a:p>
             <a:fld id="{5765335F-FC99-4A2B-B87B-6AF6F3762B67}" type="datetime1">
               <a:rPr lang="nl-BE" smtClean="0"/>
-              <a:t>11/02/2026</a:t>
+              <a:t>2/10/2026</a:t>
             </a:fld>
             <a:endParaRPr lang="nl-BE"/>
           </a:p>
@@ -2461,7 +2461,7 @@
           <a:p>
             <a:fld id="{1711BA58-B677-4D21-BDCD-9DD1AEA8A328}" type="datetime1">
               <a:rPr lang="nl-BE" smtClean="0"/>
-              <a:t>11/02/2026</a:t>
+              <a:t>2/10/2026</a:t>
             </a:fld>
             <a:endParaRPr lang="nl-BE"/>
           </a:p>
@@ -2738,7 +2738,7 @@
           <a:p>
             <a:fld id="{5513BE8B-B89C-461B-89D1-D5BE33ADB6B9}" type="datetime1">
               <a:rPr lang="nl-BE" smtClean="0"/>
-              <a:t>11/02/2026</a:t>
+              <a:t>2/10/2026</a:t>
             </a:fld>
             <a:endParaRPr lang="nl-BE"/>
           </a:p>
@@ -2995,7 +2995,7 @@
           <a:p>
             <a:fld id="{AEE65485-0554-4482-9B9C-289893A0B56B}" type="datetime1">
               <a:rPr lang="nl-BE" smtClean="0"/>
-              <a:t>11/02/2026</a:t>
+              <a:t>2/10/2026</a:t>
             </a:fld>
             <a:endParaRPr lang="nl-BE"/>
           </a:p>
@@ -3208,7 +3208,7 @@
           <a:p>
             <a:fld id="{6FF26CEC-AF8A-4096-9A53-521F7571A055}" type="datetime1">
               <a:rPr lang="nl-BE" smtClean="0"/>
-              <a:t>11/02/2026</a:t>
+              <a:t>2/10/2026</a:t>
             </a:fld>
             <a:endParaRPr lang="nl-BE"/>
           </a:p>
@@ -3781,51 +3781,6 @@
           <a:prstGeom prst="rect">
             <a:avLst/>
           </a:prstGeom>
-        </p:spPr>
-      </p:pic>
-      <p:pic>
-        <p:nvPicPr>
-          <p:cNvPr id="11" name="Picture 10">
-            <a:extLst>
-              <a:ext uri="{FF2B5EF4-FFF2-40B4-BE49-F238E27FC236}">
-                <a16:creationId xmlns:a16="http://schemas.microsoft.com/office/drawing/2014/main" id="{2D8B39AB-C0C4-F427-A259-DED7855ECAC7}"/>
-              </a:ext>
-            </a:extLst>
-          </p:cNvPr>
-          <p:cNvPicPr>
-            <a:picLocks noChangeAspect="1" noChangeArrowheads="1"/>
-          </p:cNvPicPr>
-          <p:nvPr/>
-        </p:nvPicPr>
-        <p:blipFill rotWithShape="1">
-          <a:blip r:embed="rId5" cstate="print">
-            <a:extLst>
-              <a:ext uri="{28A0092B-C50C-407E-A947-70E740481C1C}">
-                <a14:useLocalDpi xmlns:a14="http://schemas.microsoft.com/office/drawing/2010/main" val="0"/>
-              </a:ext>
-            </a:extLst>
-          </a:blip>
-          <a:srcRect b="16829"/>
-          <a:stretch/>
-        </p:blipFill>
-        <p:spPr bwMode="auto">
-          <a:xfrm>
-            <a:off x="6923707" y="511428"/>
-            <a:ext cx="1534493" cy="1422699"/>
-          </a:xfrm>
-          <a:prstGeom prst="rect">
-            <a:avLst/>
-          </a:prstGeom>
-          <a:noFill/>
-          <a:extLst>
-            <a:ext uri="{909E8E84-426E-40DD-AFC4-6F175D3DCCD1}">
-              <a14:hiddenFill xmlns:a14="http://schemas.microsoft.com/office/drawing/2010/main">
-                <a:solidFill>
-                  <a:srgbClr val="FFFFFF"/>
-                </a:solidFill>
-              </a14:hiddenFill>
-            </a:ext>
-          </a:extLst>
         </p:spPr>
       </p:pic>
     </p:spTree>
@@ -8280,7 +8235,7 @@
                 <a:latin typeface="Courier New" panose="02070309020205020404" pitchFamily="49" charset="0"/>
                 <a:cs typeface="Courier New" panose="02070309020205020404" pitchFamily="49" charset="0"/>
               </a:rPr>
-              <a:t> run -help</a:t>
+              <a:t> run --help</a:t>
             </a:r>
           </a:p>
         </p:txBody>
@@ -8430,10 +8385,10 @@
             <p:nvPr/>
           </p:nvPicPr>
           <p:blipFill>
-            <a:blip r:embed="rId2">
+            <a:blip>
               <a:extLst>
                 <a:ext uri="{96DAC541-7B7A-43D3-8B79-37D633B846F1}">
-                  <asvg:svgBlip xmlns:asvg="http://schemas.microsoft.com/office/drawing/2016/SVG/main" r:embed="rId3"/>
+                  <asvg:svgBlip xmlns:asvg="http://schemas.microsoft.com/office/drawing/2016/SVG/main" r:embed="rId2"/>
                 </a:ext>
               </a:extLst>
             </a:blip>
@@ -8561,10 +8516,10 @@
             <p:nvPr/>
           </p:nvPicPr>
           <p:blipFill>
-            <a:blip r:embed="rId2">
+            <a:blip>
               <a:extLst>
                 <a:ext uri="{96DAC541-7B7A-43D3-8B79-37D633B846F1}">
-                  <asvg:svgBlip xmlns:asvg="http://schemas.microsoft.com/office/drawing/2016/SVG/main" r:embed="rId3"/>
+                  <asvg:svgBlip xmlns:asvg="http://schemas.microsoft.com/office/drawing/2016/SVG/main" r:embed="rId2"/>
                 </a:ext>
               </a:extLst>
             </a:blip>
@@ -9099,10 +9054,10 @@
             <p:nvPr/>
           </p:nvPicPr>
           <p:blipFill>
-            <a:blip r:embed="rId2">
+            <a:blip>
               <a:extLst>
                 <a:ext uri="{96DAC541-7B7A-43D3-8B79-37D633B846F1}">
-                  <asvg:svgBlip xmlns:asvg="http://schemas.microsoft.com/office/drawing/2016/SVG/main" r:embed="rId3"/>
+                  <asvg:svgBlip xmlns:asvg="http://schemas.microsoft.com/office/drawing/2016/SVG/main" r:embed="rId2"/>
                 </a:ext>
               </a:extLst>
             </a:blip>
@@ -11161,7 +11116,7 @@
                 <a:latin typeface="Courier New" panose="02070309020205020404" pitchFamily="49" charset="0"/>
                 <a:cs typeface="Courier New" panose="02070309020205020404" pitchFamily="49" charset="0"/>
               </a:rPr>
-              <a:t>grace.sif</a:t>
+              <a:t>pytorch.sif</a:t>
             </a:r>
             <a:r>
               <a:rPr lang="en-US" b="1" dirty="0">
@@ -11171,7 +11126,7 @@
                 <a:latin typeface="Courier New" panose="02070309020205020404" pitchFamily="49" charset="0"/>
                 <a:cs typeface="Courier New" panose="02070309020205020404" pitchFamily="49" charset="0"/>
               </a:rPr>
-              <a:t> grace.def</a:t>
+              <a:t> pytorch.def</a:t>
             </a:r>
             <a:endParaRPr lang="nl-BE" b="1" dirty="0">
               <a:solidFill>
@@ -11311,10 +11266,10 @@
             <p:nvPr/>
           </p:nvPicPr>
           <p:blipFill>
-            <a:blip r:embed="rId2">
+            <a:blip>
               <a:extLst>
                 <a:ext uri="{96DAC541-7B7A-43D3-8B79-37D633B846F1}">
-                  <asvg:svgBlip xmlns:asvg="http://schemas.microsoft.com/office/drawing/2016/SVG/main" r:embed="rId3"/>
+                  <asvg:svgBlip xmlns:asvg="http://schemas.microsoft.com/office/drawing/2016/SVG/main" r:embed="rId2"/>
                 </a:ext>
               </a:extLst>
             </a:blip>
@@ -16612,10 +16567,10 @@
             <p:nvPr/>
           </p:nvPicPr>
           <p:blipFill>
-            <a:blip r:embed="rId3">
+            <a:blip>
               <a:extLst>
                 <a:ext uri="{96DAC541-7B7A-43D3-8B79-37D633B846F1}">
-                  <asvg:svgBlip xmlns:asvg="http://schemas.microsoft.com/office/drawing/2016/SVG/main" r:embed="rId4"/>
+                  <asvg:svgBlip xmlns:asvg="http://schemas.microsoft.com/office/drawing/2016/SVG/main" r:embed="rId3"/>
                 </a:ext>
               </a:extLst>
             </a:blip>
@@ -24936,10 +24891,10 @@
             <p:nvPr/>
           </p:nvPicPr>
           <p:blipFill>
-            <a:blip r:embed="rId2">
+            <a:blip>
               <a:extLst>
                 <a:ext uri="{96DAC541-7B7A-43D3-8B79-37D633B846F1}">
-                  <asvg:svgBlip xmlns:asvg="http://schemas.microsoft.com/office/drawing/2016/SVG/main" r:embed="rId3"/>
+                  <asvg:svgBlip xmlns:asvg="http://schemas.microsoft.com/office/drawing/2016/SVG/main" r:embed="rId2"/>
                 </a:ext>
               </a:extLst>
             </a:blip>
@@ -29200,10 +29155,10 @@
           <p:nvPr/>
         </p:nvPicPr>
         <p:blipFill>
-          <a:blip r:embed="rId4">
+          <a:blip>
             <a:extLst>
               <a:ext uri="{96DAC541-7B7A-43D3-8B79-37D633B846F1}">
-                <asvg:svgBlip xmlns:asvg="http://schemas.microsoft.com/office/drawing/2016/SVG/main" r:embed="rId5"/>
+                <asvg:svgBlip xmlns:asvg="http://schemas.microsoft.com/office/drawing/2016/SVG/main" r:embed="rId4"/>
               </a:ext>
             </a:extLst>
           </a:blip>
@@ -29236,10 +29191,10 @@
           <p:nvPr/>
         </p:nvPicPr>
         <p:blipFill>
-          <a:blip r:embed="rId6">
+          <a:blip>
             <a:extLst>
               <a:ext uri="{96DAC541-7B7A-43D3-8B79-37D633B846F1}">
-                <asvg:svgBlip xmlns:asvg="http://schemas.microsoft.com/office/drawing/2016/SVG/main" r:embed="rId7"/>
+                <asvg:svgBlip xmlns:asvg="http://schemas.microsoft.com/office/drawing/2016/SVG/main" r:embed="rId5"/>
               </a:ext>
             </a:extLst>
           </a:blip>
@@ -29272,10 +29227,10 @@
           <p:nvPr/>
         </p:nvPicPr>
         <p:blipFill>
-          <a:blip r:embed="rId8">
+          <a:blip>
             <a:extLst>
               <a:ext uri="{96DAC541-7B7A-43D3-8B79-37D633B846F1}">
-                <asvg:svgBlip xmlns:asvg="http://schemas.microsoft.com/office/drawing/2016/SVG/main" r:embed="rId9"/>
+                <asvg:svgBlip xmlns:asvg="http://schemas.microsoft.com/office/drawing/2016/SVG/main" r:embed="rId6"/>
               </a:ext>
             </a:extLst>
           </a:blip>
@@ -36718,10 +36673,10 @@
             <p:nvPr/>
           </p:nvPicPr>
           <p:blipFill>
-            <a:blip r:embed="rId2">
+            <a:blip>
               <a:extLst>
                 <a:ext uri="{96DAC541-7B7A-43D3-8B79-37D633B846F1}">
-                  <asvg:svgBlip xmlns:asvg="http://schemas.microsoft.com/office/drawing/2016/SVG/main" r:embed="rId3"/>
+                  <asvg:svgBlip xmlns:asvg="http://schemas.microsoft.com/office/drawing/2016/SVG/main" r:embed="rId2"/>
                 </a:ext>
               </a:extLst>
             </a:blip>
